--- a/docs/ap-graph Computational Graph Engine.pptx
+++ b/docs/ap-graph Computational Graph Engine.pptx
@@ -1,30 +1,30 @@
 
 <file path=ppt/presentation.xml><?xml version="1.0" encoding="utf-8"?>
-<p:presentation xmlns:a="http://schemas.openxmlformats.org/drawingml/2006/main" xmlns:r="http://schemas.openxmlformats.org/officeDocument/2006/relationships" xmlns:p="http://schemas.openxmlformats.org/presentationml/2006/main" saveSubsetFonts="1" embedTrueTypeFonts="true">
+<p:presentation xmlns:a="http://schemas.openxmlformats.org/drawingml/2006/main" xmlns:r="http://schemas.openxmlformats.org/officeDocument/2006/relationships" xmlns:p="http://schemas.openxmlformats.org/presentationml/2006/main" embedTrueTypeFonts="1" saveSubsetFonts="1">
   <p:sldMasterIdLst>
     <p:sldMasterId id="2147483648" r:id="rId1"/>
   </p:sldMasterIdLst>
   <p:sldIdLst>
-    <p:sldId id="256" r:id="rId6"/>
-    <p:sldId id="257" r:id="rId7"/>
-    <p:sldId id="258" r:id="rId8"/>
-    <p:sldId id="259" r:id="rId9"/>
-    <p:sldId id="260" r:id="rId10"/>
+    <p:sldId id="256" r:id="rId2"/>
+    <p:sldId id="257" r:id="rId3"/>
+    <p:sldId id="258" r:id="rId4"/>
+    <p:sldId id="259" r:id="rId5"/>
+    <p:sldId id="260" r:id="rId6"/>
   </p:sldIdLst>
   <p:sldSz cx="18288000" cy="10287000"/>
   <p:notesSz cx="6858000" cy="9144000"/>
   <p:embeddedFontLst>
     <p:embeddedFont>
-      <p:font typeface="Nyutro Sans Heavy" charset="1" panose="00000000000000000000"/>
-      <p:regular r:id="rId11"/>
+      <p:font typeface="Nyutro Sans" panose="020B0604020202020204" charset="0"/>
+      <p:regular r:id="rId7"/>
     </p:embeddedFont>
     <p:embeddedFont>
-      <p:font typeface="Nyutro Sans" charset="1" panose="00000000000000000000"/>
-      <p:regular r:id="rId12"/>
+      <p:font typeface="Nyutro Sans Bold" panose="020B0604020202020204" charset="0"/>
+      <p:regular r:id="rId8"/>
     </p:embeddedFont>
     <p:embeddedFont>
-      <p:font typeface="Nyutro Sans Bold" charset="1" panose="00000000000000000000"/>
-      <p:regular r:id="rId13"/>
+      <p:font typeface="Nyutro Sans Heavy" panose="020B0604020202020204" charset="0"/>
+      <p:regular r:id="rId9"/>
     </p:embeddedFont>
   </p:embeddedFontLst>
   <p:defaultTextStyle>
@@ -122,6 +122,22 @@
       </a:defRPr>
     </a:lvl9pPr>
   </p:defaultTextStyle>
+  <p:extLst>
+    <p:ext uri="{EFAFB233-063F-42B5-8137-9DF3F51BA10A}">
+      <p15:sldGuideLst xmlns:p15="http://schemas.microsoft.com/office/powerpoint/2012/main">
+        <p15:guide id="1" orient="horz" pos="2160">
+          <p15:clr>
+            <a:srgbClr val="A4A3A4"/>
+          </p15:clr>
+        </p15:guide>
+        <p15:guide id="2" pos="2880">
+          <p15:clr>
+            <a:srgbClr val="A4A3A4"/>
+          </p15:clr>
+        </p15:guide>
+      </p15:sldGuideLst>
+    </p:ext>
+  </p:extLst>
 </p:presentation>
 </file>
 
@@ -163,10 +179,9 @@
           <a:lstStyle/>
           <a:p>
             <a:r>
-              <a:rPr lang="en-US" smtClean="0"/>
+              <a:rPr lang="en-US"/>
               <a:t>Click to edit Master title style</a:t>
             </a:r>
-            <a:endParaRPr lang="en-US"/>
           </a:p>
         </p:txBody>
       </p:sp>
@@ -282,10 +297,9 @@
           </a:lstStyle>
           <a:p>
             <a:r>
-              <a:rPr lang="en-US" smtClean="0"/>
+              <a:rPr lang="en-US"/>
               <a:t>Click to edit Master subtitle style</a:t>
             </a:r>
-            <a:endParaRPr lang="en-US"/>
           </a:p>
         </p:txBody>
       </p:sp>
@@ -307,7 +321,7 @@
             <a:fld id="{1D8BD707-D9CF-40AE-B4C6-C98DA3205C09}" type="datetimeFigureOut">
               <a:rPr lang="en-US" smtClean="0"/>
               <a:pPr/>
-              <a:t>8/1/2011</a:t>
+              <a:t>6/27/2026</a:t>
             </a:fld>
             <a:endParaRPr lang="en-US"/>
           </a:p>
@@ -397,10 +411,9 @@
           <a:lstStyle/>
           <a:p>
             <a:r>
-              <a:rPr lang="en-US" smtClean="0"/>
+              <a:rPr lang="en-US"/>
               <a:t>Click to edit Master title style</a:t>
             </a:r>
-            <a:endParaRPr lang="en-US"/>
           </a:p>
         </p:txBody>
       </p:sp>
@@ -421,38 +434,37 @@
           <a:p>
             <a:pPr lvl="0"/>
             <a:r>
-              <a:rPr lang="en-US" smtClean="0"/>
+              <a:rPr lang="en-US"/>
               <a:t>Click to edit Master text styles</a:t>
             </a:r>
           </a:p>
           <a:p>
             <a:pPr lvl="1"/>
             <a:r>
-              <a:rPr lang="en-US" smtClean="0"/>
+              <a:rPr lang="en-US"/>
               <a:t>Second level</a:t>
             </a:r>
           </a:p>
           <a:p>
             <a:pPr lvl="2"/>
             <a:r>
-              <a:rPr lang="en-US" smtClean="0"/>
+              <a:rPr lang="en-US"/>
               <a:t>Third level</a:t>
             </a:r>
           </a:p>
           <a:p>
             <a:pPr lvl="3"/>
             <a:r>
-              <a:rPr lang="en-US" smtClean="0"/>
+              <a:rPr lang="en-US"/>
               <a:t>Fourth level</a:t>
             </a:r>
           </a:p>
           <a:p>
             <a:pPr lvl="4"/>
             <a:r>
-              <a:rPr lang="en-US" smtClean="0"/>
+              <a:rPr lang="en-US"/>
               <a:t>Fifth level</a:t>
             </a:r>
-            <a:endParaRPr lang="en-US"/>
           </a:p>
         </p:txBody>
       </p:sp>
@@ -474,7 +486,7 @@
             <a:fld id="{1D8BD707-D9CF-40AE-B4C6-C98DA3205C09}" type="datetimeFigureOut">
               <a:rPr lang="en-US" smtClean="0"/>
               <a:pPr/>
-              <a:t>8/1/2011</a:t>
+              <a:t>6/27/2026</a:t>
             </a:fld>
             <a:endParaRPr lang="en-US"/>
           </a:p>
@@ -569,10 +581,9 @@
           <a:lstStyle/>
           <a:p>
             <a:r>
-              <a:rPr lang="en-US" smtClean="0"/>
+              <a:rPr lang="en-US"/>
               <a:t>Click to edit Master title style</a:t>
             </a:r>
-            <a:endParaRPr lang="en-US"/>
           </a:p>
         </p:txBody>
       </p:sp>
@@ -598,38 +609,37 @@
           <a:p>
             <a:pPr lvl="0"/>
             <a:r>
-              <a:rPr lang="en-US" smtClean="0"/>
+              <a:rPr lang="en-US"/>
               <a:t>Click to edit Master text styles</a:t>
             </a:r>
           </a:p>
           <a:p>
             <a:pPr lvl="1"/>
             <a:r>
-              <a:rPr lang="en-US" smtClean="0"/>
+              <a:rPr lang="en-US"/>
               <a:t>Second level</a:t>
             </a:r>
           </a:p>
           <a:p>
             <a:pPr lvl="2"/>
             <a:r>
-              <a:rPr lang="en-US" smtClean="0"/>
+              <a:rPr lang="en-US"/>
               <a:t>Third level</a:t>
             </a:r>
           </a:p>
           <a:p>
             <a:pPr lvl="3"/>
             <a:r>
-              <a:rPr lang="en-US" smtClean="0"/>
+              <a:rPr lang="en-US"/>
               <a:t>Fourth level</a:t>
             </a:r>
           </a:p>
           <a:p>
             <a:pPr lvl="4"/>
             <a:r>
-              <a:rPr lang="en-US" smtClean="0"/>
+              <a:rPr lang="en-US"/>
               <a:t>Fifth level</a:t>
             </a:r>
-            <a:endParaRPr lang="en-US"/>
           </a:p>
         </p:txBody>
       </p:sp>
@@ -651,7 +661,7 @@
             <a:fld id="{1D8BD707-D9CF-40AE-B4C6-C98DA3205C09}" type="datetimeFigureOut">
               <a:rPr lang="en-US" smtClean="0"/>
               <a:pPr/>
-              <a:t>8/1/2011</a:t>
+              <a:t>6/27/2026</a:t>
             </a:fld>
             <a:endParaRPr lang="en-US"/>
           </a:p>
@@ -741,10 +751,9 @@
           <a:lstStyle/>
           <a:p>
             <a:r>
-              <a:rPr lang="en-US" smtClean="0"/>
+              <a:rPr lang="en-US"/>
               <a:t>Click to edit Master title style</a:t>
             </a:r>
-            <a:endParaRPr lang="en-US"/>
           </a:p>
         </p:txBody>
       </p:sp>
@@ -765,38 +774,37 @@
           <a:p>
             <a:pPr lvl="0"/>
             <a:r>
-              <a:rPr lang="en-US" smtClean="0"/>
+              <a:rPr lang="en-US"/>
               <a:t>Click to edit Master text styles</a:t>
             </a:r>
           </a:p>
           <a:p>
             <a:pPr lvl="1"/>
             <a:r>
-              <a:rPr lang="en-US" smtClean="0"/>
+              <a:rPr lang="en-US"/>
               <a:t>Second level</a:t>
             </a:r>
           </a:p>
           <a:p>
             <a:pPr lvl="2"/>
             <a:r>
-              <a:rPr lang="en-US" smtClean="0"/>
+              <a:rPr lang="en-US"/>
               <a:t>Third level</a:t>
             </a:r>
           </a:p>
           <a:p>
             <a:pPr lvl="3"/>
             <a:r>
-              <a:rPr lang="en-US" smtClean="0"/>
+              <a:rPr lang="en-US"/>
               <a:t>Fourth level</a:t>
             </a:r>
           </a:p>
           <a:p>
             <a:pPr lvl="4"/>
             <a:r>
-              <a:rPr lang="en-US" smtClean="0"/>
+              <a:rPr lang="en-US"/>
               <a:t>Fifth level</a:t>
             </a:r>
-            <a:endParaRPr lang="en-US"/>
           </a:p>
         </p:txBody>
       </p:sp>
@@ -818,7 +826,7 @@
             <a:fld id="{1D8BD707-D9CF-40AE-B4C6-C98DA3205C09}" type="datetimeFigureOut">
               <a:rPr lang="en-US" smtClean="0"/>
               <a:pPr/>
-              <a:t>8/1/2011</a:t>
+              <a:t>6/27/2026</a:t>
             </a:fld>
             <a:endParaRPr lang="en-US"/>
           </a:p>
@@ -917,10 +925,9 @@
           </a:lstStyle>
           <a:p>
             <a:r>
-              <a:rPr lang="en-US" smtClean="0"/>
+              <a:rPr lang="en-US"/>
               <a:t>Click to edit Master title style</a:t>
             </a:r>
-            <a:endParaRPr lang="en-US"/>
           </a:p>
         </p:txBody>
       </p:sp>
@@ -1037,7 +1044,7 @@
           <a:p>
             <a:pPr lvl="0"/>
             <a:r>
-              <a:rPr lang="en-US" smtClean="0"/>
+              <a:rPr lang="en-US"/>
               <a:t>Click to edit Master text styles</a:t>
             </a:r>
           </a:p>
@@ -1061,7 +1068,7 @@
             <a:fld id="{1D8BD707-D9CF-40AE-B4C6-C98DA3205C09}" type="datetimeFigureOut">
               <a:rPr lang="en-US" smtClean="0"/>
               <a:pPr/>
-              <a:t>8/1/2011</a:t>
+              <a:t>6/27/2026</a:t>
             </a:fld>
             <a:endParaRPr lang="en-US"/>
           </a:p>
@@ -1151,10 +1158,9 @@
           <a:lstStyle/>
           <a:p>
             <a:r>
-              <a:rPr lang="en-US" smtClean="0"/>
+              <a:rPr lang="en-US"/>
               <a:t>Click to edit Master title style</a:t>
             </a:r>
-            <a:endParaRPr lang="en-US"/>
           </a:p>
         </p:txBody>
       </p:sp>
@@ -1208,38 +1214,37 @@
           <a:p>
             <a:pPr lvl="0"/>
             <a:r>
-              <a:rPr lang="en-US" smtClean="0"/>
+              <a:rPr lang="en-US"/>
               <a:t>Click to edit Master text styles</a:t>
             </a:r>
           </a:p>
           <a:p>
             <a:pPr lvl="1"/>
             <a:r>
-              <a:rPr lang="en-US" smtClean="0"/>
+              <a:rPr lang="en-US"/>
               <a:t>Second level</a:t>
             </a:r>
           </a:p>
           <a:p>
             <a:pPr lvl="2"/>
             <a:r>
-              <a:rPr lang="en-US" smtClean="0"/>
+              <a:rPr lang="en-US"/>
               <a:t>Third level</a:t>
             </a:r>
           </a:p>
           <a:p>
             <a:pPr lvl="3"/>
             <a:r>
-              <a:rPr lang="en-US" smtClean="0"/>
+              <a:rPr lang="en-US"/>
               <a:t>Fourth level</a:t>
             </a:r>
           </a:p>
           <a:p>
             <a:pPr lvl="4"/>
             <a:r>
-              <a:rPr lang="en-US" smtClean="0"/>
+              <a:rPr lang="en-US"/>
               <a:t>Fifth level</a:t>
             </a:r>
-            <a:endParaRPr lang="en-US"/>
           </a:p>
         </p:txBody>
       </p:sp>
@@ -1293,38 +1298,37 @@
           <a:p>
             <a:pPr lvl="0"/>
             <a:r>
-              <a:rPr lang="en-US" smtClean="0"/>
+              <a:rPr lang="en-US"/>
               <a:t>Click to edit Master text styles</a:t>
             </a:r>
           </a:p>
           <a:p>
             <a:pPr lvl="1"/>
             <a:r>
-              <a:rPr lang="en-US" smtClean="0"/>
+              <a:rPr lang="en-US"/>
               <a:t>Second level</a:t>
             </a:r>
           </a:p>
           <a:p>
             <a:pPr lvl="2"/>
             <a:r>
-              <a:rPr lang="en-US" smtClean="0"/>
+              <a:rPr lang="en-US"/>
               <a:t>Third level</a:t>
             </a:r>
           </a:p>
           <a:p>
             <a:pPr lvl="3"/>
             <a:r>
-              <a:rPr lang="en-US" smtClean="0"/>
+              <a:rPr lang="en-US"/>
               <a:t>Fourth level</a:t>
             </a:r>
           </a:p>
           <a:p>
             <a:pPr lvl="4"/>
             <a:r>
-              <a:rPr lang="en-US" smtClean="0"/>
+              <a:rPr lang="en-US"/>
               <a:t>Fifth level</a:t>
             </a:r>
-            <a:endParaRPr lang="en-US"/>
           </a:p>
         </p:txBody>
       </p:sp>
@@ -1346,7 +1350,7 @@
             <a:fld id="{1D8BD707-D9CF-40AE-B4C6-C98DA3205C09}" type="datetimeFigureOut">
               <a:rPr lang="en-US" smtClean="0"/>
               <a:pPr/>
-              <a:t>8/1/2011</a:t>
+              <a:t>6/27/2026</a:t>
             </a:fld>
             <a:endParaRPr lang="en-US"/>
           </a:p>
@@ -1440,10 +1444,9 @@
           </a:lstStyle>
           <a:p>
             <a:r>
-              <a:rPr lang="en-US" smtClean="0"/>
+              <a:rPr lang="en-US"/>
               <a:t>Click to edit Master title style</a:t>
             </a:r>
-            <a:endParaRPr lang="en-US"/>
           </a:p>
         </p:txBody>
       </p:sp>
@@ -1506,7 +1509,7 @@
           <a:p>
             <a:pPr lvl="0"/>
             <a:r>
-              <a:rPr lang="en-US" smtClean="0"/>
+              <a:rPr lang="en-US"/>
               <a:t>Click to edit Master text styles</a:t>
             </a:r>
           </a:p>
@@ -1562,38 +1565,37 @@
           <a:p>
             <a:pPr lvl="0"/>
             <a:r>
-              <a:rPr lang="en-US" smtClean="0"/>
+              <a:rPr lang="en-US"/>
               <a:t>Click to edit Master text styles</a:t>
             </a:r>
           </a:p>
           <a:p>
             <a:pPr lvl="1"/>
             <a:r>
-              <a:rPr lang="en-US" smtClean="0"/>
+              <a:rPr lang="en-US"/>
               <a:t>Second level</a:t>
             </a:r>
           </a:p>
           <a:p>
             <a:pPr lvl="2"/>
             <a:r>
-              <a:rPr lang="en-US" smtClean="0"/>
+              <a:rPr lang="en-US"/>
               <a:t>Third level</a:t>
             </a:r>
           </a:p>
           <a:p>
             <a:pPr lvl="3"/>
             <a:r>
-              <a:rPr lang="en-US" smtClean="0"/>
+              <a:rPr lang="en-US"/>
               <a:t>Fourth level</a:t>
             </a:r>
           </a:p>
           <a:p>
             <a:pPr lvl="4"/>
             <a:r>
-              <a:rPr lang="en-US" smtClean="0"/>
+              <a:rPr lang="en-US"/>
               <a:t>Fifth level</a:t>
             </a:r>
-            <a:endParaRPr lang="en-US"/>
           </a:p>
         </p:txBody>
       </p:sp>
@@ -1656,7 +1658,7 @@
           <a:p>
             <a:pPr lvl="0"/>
             <a:r>
-              <a:rPr lang="en-US" smtClean="0"/>
+              <a:rPr lang="en-US"/>
               <a:t>Click to edit Master text styles</a:t>
             </a:r>
           </a:p>
@@ -1712,38 +1714,37 @@
           <a:p>
             <a:pPr lvl="0"/>
             <a:r>
-              <a:rPr lang="en-US" smtClean="0"/>
+              <a:rPr lang="en-US"/>
               <a:t>Click to edit Master text styles</a:t>
             </a:r>
           </a:p>
           <a:p>
             <a:pPr lvl="1"/>
             <a:r>
-              <a:rPr lang="en-US" smtClean="0"/>
+              <a:rPr lang="en-US"/>
               <a:t>Second level</a:t>
             </a:r>
           </a:p>
           <a:p>
             <a:pPr lvl="2"/>
             <a:r>
-              <a:rPr lang="en-US" smtClean="0"/>
+              <a:rPr lang="en-US"/>
               <a:t>Third level</a:t>
             </a:r>
           </a:p>
           <a:p>
             <a:pPr lvl="3"/>
             <a:r>
-              <a:rPr lang="en-US" smtClean="0"/>
+              <a:rPr lang="en-US"/>
               <a:t>Fourth level</a:t>
             </a:r>
           </a:p>
           <a:p>
             <a:pPr lvl="4"/>
             <a:r>
-              <a:rPr lang="en-US" smtClean="0"/>
+              <a:rPr lang="en-US"/>
               <a:t>Fifth level</a:t>
             </a:r>
-            <a:endParaRPr lang="en-US"/>
           </a:p>
         </p:txBody>
       </p:sp>
@@ -1765,7 +1766,7 @@
             <a:fld id="{1D8BD707-D9CF-40AE-B4C6-C98DA3205C09}" type="datetimeFigureOut">
               <a:rPr lang="en-US" smtClean="0"/>
               <a:pPr/>
-              <a:t>8/1/2011</a:t>
+              <a:t>6/27/2026</a:t>
             </a:fld>
             <a:endParaRPr lang="en-US"/>
           </a:p>
@@ -1855,10 +1856,9 @@
           <a:lstStyle/>
           <a:p>
             <a:r>
-              <a:rPr lang="en-US" smtClean="0"/>
+              <a:rPr lang="en-US"/>
               <a:t>Click to edit Master title style</a:t>
             </a:r>
-            <a:endParaRPr lang="en-US"/>
           </a:p>
         </p:txBody>
       </p:sp>
@@ -1880,7 +1880,7 @@
             <a:fld id="{1D8BD707-D9CF-40AE-B4C6-C98DA3205C09}" type="datetimeFigureOut">
               <a:rPr lang="en-US" smtClean="0"/>
               <a:pPr/>
-              <a:t>8/1/2011</a:t>
+              <a:t>6/27/2026</a:t>
             </a:fld>
             <a:endParaRPr lang="en-US"/>
           </a:p>
@@ -1972,7 +1972,7 @@
             <a:fld id="{1D8BD707-D9CF-40AE-B4C6-C98DA3205C09}" type="datetimeFigureOut">
               <a:rPr lang="en-US" smtClean="0"/>
               <a:pPr/>
-              <a:t>8/1/2011</a:t>
+              <a:t>6/27/2026</a:t>
             </a:fld>
             <a:endParaRPr lang="en-US"/>
           </a:p>
@@ -2071,10 +2071,9 @@
           </a:lstStyle>
           <a:p>
             <a:r>
-              <a:rPr lang="en-US" smtClean="0"/>
+              <a:rPr lang="en-US"/>
               <a:t>Click to edit Master title style</a:t>
             </a:r>
-            <a:endParaRPr lang="en-US"/>
           </a:p>
         </p:txBody>
       </p:sp>
@@ -2128,38 +2127,37 @@
           <a:p>
             <a:pPr lvl="0"/>
             <a:r>
-              <a:rPr lang="en-US" smtClean="0"/>
+              <a:rPr lang="en-US"/>
               <a:t>Click to edit Master text styles</a:t>
             </a:r>
           </a:p>
           <a:p>
             <a:pPr lvl="1"/>
             <a:r>
-              <a:rPr lang="en-US" smtClean="0"/>
+              <a:rPr lang="en-US"/>
               <a:t>Second level</a:t>
             </a:r>
           </a:p>
           <a:p>
             <a:pPr lvl="2"/>
             <a:r>
-              <a:rPr lang="en-US" smtClean="0"/>
+              <a:rPr lang="en-US"/>
               <a:t>Third level</a:t>
             </a:r>
           </a:p>
           <a:p>
             <a:pPr lvl="3"/>
             <a:r>
-              <a:rPr lang="en-US" smtClean="0"/>
+              <a:rPr lang="en-US"/>
               <a:t>Fourth level</a:t>
             </a:r>
           </a:p>
           <a:p>
             <a:pPr lvl="4"/>
             <a:r>
-              <a:rPr lang="en-US" smtClean="0"/>
+              <a:rPr lang="en-US"/>
               <a:t>Fifth level</a:t>
             </a:r>
-            <a:endParaRPr lang="en-US"/>
           </a:p>
         </p:txBody>
       </p:sp>
@@ -2222,7 +2220,7 @@
           <a:p>
             <a:pPr lvl="0"/>
             <a:r>
-              <a:rPr lang="en-US" smtClean="0"/>
+              <a:rPr lang="en-US"/>
               <a:t>Click to edit Master text styles</a:t>
             </a:r>
           </a:p>
@@ -2246,7 +2244,7 @@
             <a:fld id="{1D8BD707-D9CF-40AE-B4C6-C98DA3205C09}" type="datetimeFigureOut">
               <a:rPr lang="en-US" smtClean="0"/>
               <a:pPr/>
-              <a:t>8/1/2011</a:t>
+              <a:t>6/27/2026</a:t>
             </a:fld>
             <a:endParaRPr lang="en-US"/>
           </a:p>
@@ -2345,10 +2343,9 @@
           </a:lstStyle>
           <a:p>
             <a:r>
-              <a:rPr lang="en-US" smtClean="0"/>
+              <a:rPr lang="en-US"/>
               <a:t>Click to edit Master title style</a:t>
             </a:r>
-            <a:endParaRPr lang="en-US"/>
           </a:p>
         </p:txBody>
       </p:sp>
@@ -2472,7 +2469,7 @@
           <a:p>
             <a:pPr lvl="0"/>
             <a:r>
-              <a:rPr lang="en-US" smtClean="0"/>
+              <a:rPr lang="en-US"/>
               <a:t>Click to edit Master text styles</a:t>
             </a:r>
           </a:p>
@@ -2496,7 +2493,7 @@
             <a:fld id="{1D8BD707-D9CF-40AE-B4C6-C98DA3205C09}" type="datetimeFigureOut">
               <a:rPr lang="en-US" smtClean="0"/>
               <a:pPr/>
-              <a:t>8/1/2011</a:t>
+              <a:t>6/27/2026</a:t>
             </a:fld>
             <a:endParaRPr lang="en-US"/>
           </a:p>
@@ -2601,10 +2598,9 @@
           <a:lstStyle/>
           <a:p>
             <a:r>
-              <a:rPr lang="en-US" smtClean="0"/>
+              <a:rPr lang="en-US"/>
               <a:t>Click to edit Master title style</a:t>
             </a:r>
-            <a:endParaRPr lang="en-US"/>
           </a:p>
         </p:txBody>
       </p:sp>
@@ -2635,38 +2631,37 @@
           <a:p>
             <a:pPr lvl="0"/>
             <a:r>
-              <a:rPr lang="en-US" smtClean="0"/>
+              <a:rPr lang="en-US"/>
               <a:t>Click to edit Master text styles</a:t>
             </a:r>
           </a:p>
           <a:p>
             <a:pPr lvl="1"/>
             <a:r>
-              <a:rPr lang="en-US" smtClean="0"/>
+              <a:rPr lang="en-US"/>
               <a:t>Second level</a:t>
             </a:r>
           </a:p>
           <a:p>
             <a:pPr lvl="2"/>
             <a:r>
-              <a:rPr lang="en-US" smtClean="0"/>
+              <a:rPr lang="en-US"/>
               <a:t>Third level</a:t>
             </a:r>
           </a:p>
           <a:p>
             <a:pPr lvl="3"/>
             <a:r>
-              <a:rPr lang="en-US" smtClean="0"/>
+              <a:rPr lang="en-US"/>
               <a:t>Fourth level</a:t>
             </a:r>
           </a:p>
           <a:p>
             <a:pPr lvl="4"/>
             <a:r>
-              <a:rPr lang="en-US" smtClean="0"/>
+              <a:rPr lang="en-US"/>
               <a:t>Fifth level</a:t>
             </a:r>
-            <a:endParaRPr lang="en-US"/>
           </a:p>
         </p:txBody>
       </p:sp>
@@ -2706,7 +2701,7 @@
             <a:fld id="{1D8BD707-D9CF-40AE-B4C6-C98DA3205C09}" type="datetimeFigureOut">
               <a:rPr lang="en-US" smtClean="0"/>
               <a:pPr/>
-              <a:t>8/1/2011</a:t>
+              <a:t>6/27/2026</a:t>
             </a:fld>
             <a:endParaRPr lang="en-US"/>
           </a:p>
@@ -3061,13 +3056,14 @@
 </file>
 
 <file path=ppt/slides/slide1.xml><?xml version="1.0" encoding="utf-8"?>
-<p:sld xmlns:p="http://schemas.openxmlformats.org/presentationml/2006/main" xmlns:a="http://schemas.openxmlformats.org/drawingml/2006/main" xmlns:r="http://schemas.openxmlformats.org/officeDocument/2006/relationships">
+<p:sld xmlns:a="http://schemas.openxmlformats.org/drawingml/2006/main" xmlns:r="http://schemas.openxmlformats.org/officeDocument/2006/relationships" xmlns:p="http://schemas.openxmlformats.org/presentationml/2006/main">
   <p:cSld>
     <p:bg>
       <p:bgPr>
         <a:solidFill>
           <a:srgbClr val="1A1F36"/>
         </a:solidFill>
+        <a:effectLst/>
       </p:bgPr>
     </p:bg>
     <p:spTree>
@@ -3086,12 +3082,12 @@
       </p:grpSpPr>
       <p:grpSp>
         <p:nvGrpSpPr>
-          <p:cNvPr name="Group 2" id="2"/>
+          <p:cNvPr id="2" name="Group 2"/>
           <p:cNvGrpSpPr/>
           <p:nvPr/>
         </p:nvGrpSpPr>
         <p:grpSpPr>
-          <a:xfrm rot="0">
+          <a:xfrm>
             <a:off x="10379008" y="116218"/>
             <a:ext cx="7908992" cy="10283443"/>
             <a:chOff x="0" y="0"/>
@@ -3100,12 +3096,12 @@
         </p:grpSpPr>
         <p:sp>
           <p:nvSpPr>
-            <p:cNvPr name="Freeform 3" id="3"/>
+            <p:cNvPr id="3" name="Freeform 3"/>
             <p:cNvSpPr/>
             <p:nvPr/>
           </p:nvSpPr>
           <p:spPr>
-            <a:xfrm flipH="false" flipV="false" rot="0">
+            <a:xfrm>
               <a:off x="0" y="0"/>
               <a:ext cx="2140273" cy="2782840"/>
             </a:xfrm>
@@ -3114,9 +3110,9 @@
               <a:gdLst/>
               <a:ahLst/>
               <a:cxnLst/>
-              <a:rect r="r" b="b" t="t" l="l"/>
+              <a:rect l="l" t="t" r="r" b="b"/>
               <a:pathLst>
-                <a:path h="2782840" w="2140273">
+                <a:path w="2140273" h="2782840">
                   <a:moveTo>
                     <a:pt x="1652831" y="0"/>
                   </a:moveTo>
@@ -3167,20 +3163,27 @@
             <a:blipFill>
               <a:blip r:embed="rId2"/>
               <a:stretch>
-                <a:fillRect l="-25390" t="0" r="-25390" b="0"/>
+                <a:fillRect l="-25390" r="-25390"/>
               </a:stretch>
             </a:blipFill>
           </p:spPr>
+          <p:txBody>
+            <a:bodyPr/>
+            <a:lstStyle/>
+            <a:p>
+              <a:endParaRPr lang="he-IL"/>
+            </a:p>
+          </p:txBody>
         </p:sp>
       </p:grpSp>
       <p:grpSp>
         <p:nvGrpSpPr>
-          <p:cNvPr name="Group 4" id="4"/>
+          <p:cNvPr id="4" name="Group 4"/>
           <p:cNvGrpSpPr/>
           <p:nvPr/>
         </p:nvGrpSpPr>
         <p:grpSpPr>
-          <a:xfrm rot="0">
+          <a:xfrm>
             <a:off x="100488" y="666750"/>
             <a:ext cx="10250739" cy="6205227"/>
             <a:chOff x="0" y="0"/>
@@ -3189,12 +3192,12 @@
         </p:grpSpPr>
         <p:sp>
           <p:nvSpPr>
-            <p:cNvPr name="TextBox 5" id="5"/>
-            <p:cNvSpPr txBox="true"/>
+            <p:cNvPr id="5" name="TextBox 5"/>
+            <p:cNvSpPr txBox="1"/>
             <p:nvPr/>
           </p:nvSpPr>
           <p:spPr>
-            <a:xfrm rot="0">
+            <a:xfrm>
               <a:off x="0" y="0"/>
               <a:ext cx="13667653" cy="6241636"/>
             </a:xfrm>
@@ -3203,18 +3206,18 @@
             </a:prstGeom>
           </p:spPr>
           <p:txBody>
-            <a:bodyPr anchor="t" rtlCol="false" tIns="0" lIns="0" bIns="0" rIns="0">
+            <a:bodyPr lIns="0" tIns="0" rIns="0" bIns="0" rtlCol="0" anchor="t">
               <a:spAutoFit/>
             </a:bodyPr>
             <a:lstStyle/>
             <a:p>
-              <a:pPr algn="l" marL="0" indent="0" lvl="0">
+              <a:pPr marL="0" lvl="0" indent="0" algn="l">
                 <a:lnSpc>
                   <a:spcPts val="8800"/>
                 </a:lnSpc>
               </a:pPr>
               <a:r>
-                <a:rPr lang="en-US" b="true" sz="8800" spc="-88">
+                <a:rPr lang="en-US" sz="8800" b="1" spc="-88">
                   <a:solidFill>
                     <a:srgbClr val="AAB8DF"/>
                   </a:solidFill>
@@ -3223,31 +3226,19 @@
                   <a:cs typeface="Nyutro Sans Heavy"/>
                   <a:sym typeface="Nyutro Sans Heavy"/>
                 </a:rPr>
-                <a:t>A</a:t>
-              </a:r>
-              <a:r>
-                <a:rPr lang="en-US" b="true" sz="8800" spc="-88">
-                  <a:solidFill>
-                    <a:srgbClr val="AAB8DF"/>
-                  </a:solidFill>
-                  <a:latin typeface="Nyutro Sans Heavy"/>
-                  <a:ea typeface="Nyutro Sans Heavy"/>
-                  <a:cs typeface="Nyutro Sans Heavy"/>
-                  <a:sym typeface="Nyutro Sans Heavy"/>
-                </a:rPr>
-                <a:t>dvanced Programming 83677: Computational Graph Project</a:t>
+                <a:t>Advanced Programming 83677: Computational Graph Project</a:t>
               </a:r>
             </a:p>
           </p:txBody>
         </p:sp>
         <p:sp>
           <p:nvSpPr>
-            <p:cNvPr name="TextBox 6" id="6"/>
-            <p:cNvSpPr txBox="true"/>
+            <p:cNvPr id="6" name="TextBox 6"/>
+            <p:cNvSpPr txBox="1"/>
             <p:nvPr/>
           </p:nvSpPr>
           <p:spPr>
-            <a:xfrm rot="0">
+            <a:xfrm>
               <a:off x="0" y="6117811"/>
               <a:ext cx="9182100" cy="2155825"/>
             </a:xfrm>
@@ -3256,12 +3247,12 @@
             </a:prstGeom>
           </p:spPr>
           <p:txBody>
-            <a:bodyPr anchor="t" rtlCol="false" tIns="0" lIns="0" bIns="0" rIns="0">
+            <a:bodyPr lIns="0" tIns="0" rIns="0" bIns="0" rtlCol="0" anchor="t">
               <a:spAutoFit/>
             </a:bodyPr>
             <a:lstStyle/>
             <a:p>
-              <a:pPr algn="l" marL="0" indent="0" lvl="0">
+              <a:pPr marL="0" lvl="0" indent="0" algn="l">
                 <a:lnSpc>
                   <a:spcPts val="4200"/>
                 </a:lnSpc>
@@ -3276,23 +3267,11 @@
                   <a:cs typeface="Nyutro Sans"/>
                   <a:sym typeface="Nyutro Sans"/>
                 </a:rPr>
-                <a:t>Name: </a:t>
-              </a:r>
-              <a:r>
-                <a:rPr lang="en-US" sz="3000" spc="-60">
-                  <a:solidFill>
-                    <a:srgbClr val="7189B7"/>
-                  </a:solidFill>
-                  <a:latin typeface="Nyutro Sans"/>
-                  <a:ea typeface="Nyutro Sans"/>
-                  <a:cs typeface="Nyutro Sans"/>
-                  <a:sym typeface="Nyutro Sans"/>
-                </a:rPr>
-                <a:t>Bar Ben Haim</a:t>
+                <a:t>Name: Bar Ben Haim</a:t>
               </a:r>
             </a:p>
             <a:p>
-              <a:pPr algn="l" marL="0" indent="0" lvl="0">
+              <a:pPr marL="0" lvl="0" indent="0" algn="l">
                 <a:lnSpc>
                   <a:spcPts val="4200"/>
                 </a:lnSpc>
@@ -3311,7 +3290,7 @@
               </a:r>
             </a:p>
             <a:p>
-              <a:pPr algn="l" marL="0" indent="0" lvl="0">
+              <a:pPr marL="0" lvl="0" indent="0" algn="l">
                 <a:lnSpc>
                   <a:spcPts val="4200"/>
                 </a:lnSpc>
@@ -3341,13 +3320,14 @@
 </file>
 
 <file path=ppt/slides/slide2.xml><?xml version="1.0" encoding="utf-8"?>
-<p:sld xmlns:p="http://schemas.openxmlformats.org/presentationml/2006/main" xmlns:a="http://schemas.openxmlformats.org/drawingml/2006/main" xmlns:r="http://schemas.openxmlformats.org/officeDocument/2006/relationships">
+<p:sld xmlns:a="http://schemas.openxmlformats.org/drawingml/2006/main" xmlns:r="http://schemas.openxmlformats.org/officeDocument/2006/relationships" xmlns:p="http://schemas.openxmlformats.org/presentationml/2006/main">
   <p:cSld>
     <p:bg>
       <p:bgPr>
         <a:solidFill>
           <a:srgbClr val="1A1F36"/>
         </a:solidFill>
+        <a:effectLst/>
       </p:bgPr>
     </p:bg>
     <p:spTree>
@@ -3366,12 +3346,12 @@
       </p:grpSpPr>
       <p:grpSp>
         <p:nvGrpSpPr>
-          <p:cNvPr name="Group 2" id="2"/>
+          <p:cNvPr id="2" name="Group 2"/>
           <p:cNvGrpSpPr/>
           <p:nvPr/>
         </p:nvGrpSpPr>
         <p:grpSpPr>
-          <a:xfrm rot="0">
+          <a:xfrm>
             <a:off x="113334" y="210595"/>
             <a:ext cx="11592579" cy="7347480"/>
             <a:chOff x="0" y="0"/>
@@ -3380,12 +3360,12 @@
         </p:grpSpPr>
         <p:sp>
           <p:nvSpPr>
-            <p:cNvPr name="TextBox 3" id="3"/>
-            <p:cNvSpPr txBox="true"/>
+            <p:cNvPr id="3" name="TextBox 3"/>
+            <p:cNvSpPr txBox="1"/>
             <p:nvPr/>
           </p:nvSpPr>
           <p:spPr>
-            <a:xfrm rot="0">
+            <a:xfrm>
               <a:off x="0" y="3944057"/>
               <a:ext cx="15456772" cy="5852583"/>
             </a:xfrm>
@@ -3394,12 +3374,12 @@
             </a:prstGeom>
           </p:spPr>
           <p:txBody>
-            <a:bodyPr anchor="t" rtlCol="false" tIns="0" lIns="0" bIns="0" rIns="0">
+            <a:bodyPr lIns="0" tIns="0" rIns="0" bIns="0" rtlCol="0" anchor="t">
               <a:spAutoFit/>
             </a:bodyPr>
             <a:lstStyle/>
             <a:p>
-              <a:pPr algn="l" marL="539749" indent="-269875" lvl="1">
+              <a:pPr marL="539749" lvl="1" indent="-269875" algn="l">
                 <a:lnSpc>
                   <a:spcPts val="3499"/>
                 </a:lnSpc>
@@ -3423,7 +3403,7 @@
               </a:r>
             </a:p>
             <a:p>
-              <a:pPr algn="l" marL="539749" indent="-269875" lvl="1">
+              <a:pPr marL="539749" lvl="1" indent="-269875" algn="l">
                 <a:lnSpc>
                   <a:spcPts val="3499"/>
                 </a:lnSpc>
@@ -3443,22 +3423,10 @@
                   <a:cs typeface="Nyutro Sans"/>
                   <a:sym typeface="Nyutro Sans"/>
                 </a:rPr>
-                <a:t>The </a:t>
+                <a:t>The Ap-graph project offers a configurable solution that enables </a:t>
               </a:r>
               <a:r>
-                <a:rPr lang="en-US" sz="2499">
-                  <a:solidFill>
-                    <a:srgbClr val="7189B7"/>
-                  </a:solidFill>
-                  <a:latin typeface="Nyutro Sans"/>
-                  <a:ea typeface="Nyutro Sans"/>
-                  <a:cs typeface="Nyutro Sans"/>
-                  <a:sym typeface="Nyutro Sans"/>
-                </a:rPr>
-                <a:t>Ap-graph project offers a configurable solution that enables </a:t>
-              </a:r>
-              <a:r>
-                <a:rPr lang="en-US" b="true" sz="2499">
+                <a:rPr lang="en-US" sz="2499" b="1">
                   <a:solidFill>
                     <a:srgbClr val="7189B7"/>
                   </a:solidFill>
@@ -3479,46 +3447,10 @@
                   <a:cs typeface="Nyutro Sans"/>
                   <a:sym typeface="Nyutro Sans"/>
                 </a:rPr>
-                <a:t> </a:t>
+                <a:t> and a generic </a:t>
               </a:r>
               <a:r>
-                <a:rPr lang="en-US" sz="2499">
-                  <a:solidFill>
-                    <a:srgbClr val="7189B7"/>
-                  </a:solidFill>
-                  <a:latin typeface="Nyutro Sans"/>
-                  <a:ea typeface="Nyutro Sans"/>
-                  <a:cs typeface="Nyutro Sans"/>
-                  <a:sym typeface="Nyutro Sans"/>
-                </a:rPr>
-                <a:t>and</a:t>
-              </a:r>
-              <a:r>
-                <a:rPr lang="en-US" sz="2499">
-                  <a:solidFill>
-                    <a:srgbClr val="7189B7"/>
-                  </a:solidFill>
-                  <a:latin typeface="Nyutro Sans"/>
-                  <a:ea typeface="Nyutro Sans"/>
-                  <a:cs typeface="Nyutro Sans"/>
-                  <a:sym typeface="Nyutro Sans"/>
-                </a:rPr>
-                <a:t> a generic</a:t>
-              </a:r>
-              <a:r>
-                <a:rPr lang="en-US" sz="2499">
-                  <a:solidFill>
-                    <a:srgbClr val="7189B7"/>
-                  </a:solidFill>
-                  <a:latin typeface="Nyutro Sans"/>
-                  <a:ea typeface="Nyutro Sans"/>
-                  <a:cs typeface="Nyutro Sans"/>
-                  <a:sym typeface="Nyutro Sans"/>
-                </a:rPr>
-                <a:t> </a:t>
-              </a:r>
-              <a:r>
-                <a:rPr lang="en-US" b="true" sz="2499">
+                <a:rPr lang="en-US" sz="2499" b="1">
                   <a:solidFill>
                     <a:srgbClr val="7189B7"/>
                   </a:solidFill>
@@ -3539,22 +3471,10 @@
                   <a:cs typeface="Nyutro Sans"/>
                   <a:sym typeface="Nyutro Sans"/>
                 </a:rPr>
-                <a:t>+</a:t>
+                <a:t>+ </a:t>
               </a:r>
               <a:r>
-                <a:rPr lang="en-US" sz="2499">
-                  <a:solidFill>
-                    <a:srgbClr val="7189B7"/>
-                  </a:solidFill>
-                  <a:latin typeface="Nyutro Sans"/>
-                  <a:ea typeface="Nyutro Sans"/>
-                  <a:cs typeface="Nyutro Sans"/>
-                  <a:sym typeface="Nyutro Sans"/>
-                </a:rPr>
-                <a:t> </a:t>
-              </a:r>
-              <a:r>
-                <a:rPr lang="en-US" b="true" sz="2499">
+                <a:rPr lang="en-US" sz="2499" b="1">
                   <a:solidFill>
                     <a:srgbClr val="7189B7"/>
                   </a:solidFill>
@@ -3575,23 +3495,11 @@
                   <a:cs typeface="Nyutro Sans"/>
                   <a:sym typeface="Nyutro Sans"/>
                 </a:rPr>
-                <a:t> infrastructure</a:t>
-              </a:r>
-              <a:r>
-                <a:rPr lang="en-US" sz="2499">
-                  <a:solidFill>
-                    <a:srgbClr val="7189B7"/>
-                  </a:solidFill>
-                  <a:latin typeface="Nyutro Sans"/>
-                  <a:ea typeface="Nyutro Sans"/>
-                  <a:cs typeface="Nyutro Sans"/>
-                  <a:sym typeface="Nyutro Sans"/>
-                </a:rPr>
-                <a:t>.</a:t>
+                <a:t> infrastructure.</a:t>
               </a:r>
             </a:p>
             <a:p>
-              <a:pPr algn="l" marL="539749" indent="-269875" lvl="1">
+              <a:pPr marL="539749" lvl="1" indent="-269875" algn="l">
                 <a:lnSpc>
                   <a:spcPts val="3499"/>
                 </a:lnSpc>
@@ -3615,7 +3523,7 @@
               </a:r>
             </a:p>
             <a:p>
-              <a:pPr algn="l" marL="1079499" indent="-359833" lvl="2">
+              <a:pPr marL="1079499" lvl="2" indent="-359833" algn="l">
                 <a:lnSpc>
                   <a:spcPts val="3499"/>
                 </a:lnSpc>
@@ -3639,7 +3547,7 @@
               </a:r>
             </a:p>
             <a:p>
-              <a:pPr algn="l" marL="1079499" indent="-359833" lvl="2">
+              <a:pPr marL="1079499" lvl="2" indent="-359833" algn="l">
                 <a:lnSpc>
                   <a:spcPts val="3499"/>
                 </a:lnSpc>
@@ -3663,7 +3571,7 @@
               </a:r>
             </a:p>
             <a:p>
-              <a:pPr algn="l" marL="1079499" indent="-359833" lvl="2">
+              <a:pPr marL="1079499" lvl="2" indent="-359833" algn="l">
                 <a:lnSpc>
                   <a:spcPts val="3499"/>
                 </a:lnSpc>
@@ -3687,7 +3595,7 @@
               </a:r>
             </a:p>
             <a:p>
-              <a:pPr algn="l" marL="1079499" indent="-359833" lvl="2">
+              <a:pPr marL="1079499" lvl="2" indent="-359833" algn="l">
                 <a:lnSpc>
                   <a:spcPts val="3499"/>
                 </a:lnSpc>
@@ -3711,7 +3619,7 @@
               </a:r>
             </a:p>
             <a:p>
-              <a:pPr algn="l" marL="539749" indent="-269875" lvl="1">
+              <a:pPr marL="539749" lvl="1" indent="-269875" algn="l">
                 <a:lnSpc>
                   <a:spcPts val="3499"/>
                 </a:lnSpc>
@@ -3738,12 +3646,12 @@
         </p:sp>
         <p:sp>
           <p:nvSpPr>
-            <p:cNvPr name="TextBox 4" id="4"/>
-            <p:cNvSpPr txBox="true"/>
+            <p:cNvPr id="4" name="TextBox 4"/>
+            <p:cNvSpPr txBox="1"/>
             <p:nvPr/>
           </p:nvSpPr>
           <p:spPr>
-            <a:xfrm rot="0">
+            <a:xfrm>
               <a:off x="0" y="76200"/>
               <a:ext cx="15456772" cy="3124200"/>
             </a:xfrm>
@@ -3752,12 +3660,12 @@
             </a:prstGeom>
           </p:spPr>
           <p:txBody>
-            <a:bodyPr anchor="t" rtlCol="false" tIns="0" lIns="0" bIns="0" rIns="0">
+            <a:bodyPr lIns="0" tIns="0" rIns="0" bIns="0" rtlCol="0" anchor="t">
               <a:spAutoFit/>
             </a:bodyPr>
             <a:lstStyle/>
             <a:p>
-              <a:pPr algn="l" marL="0" indent="0" lvl="0">
+              <a:pPr marL="0" lvl="0" indent="0" algn="l">
                 <a:lnSpc>
                   <a:spcPts val="8100"/>
                 </a:lnSpc>
@@ -3766,7 +3674,7 @@
                 </a:spcBef>
               </a:pPr>
               <a:r>
-                <a:rPr lang="en-US" b="true" sz="9000" spc="-89" strike="noStrike" u="none">
+                <a:rPr lang="en-US" sz="9000" b="1" u="none" strike="noStrike" spc="-89">
                   <a:solidFill>
                     <a:srgbClr val="AAB8DF"/>
                   </a:solidFill>
@@ -3783,12 +3691,12 @@
       </p:grpSp>
       <p:grpSp>
         <p:nvGrpSpPr>
-          <p:cNvPr name="Group 5" id="5"/>
+          <p:cNvPr id="5" name="Group 5"/>
           <p:cNvGrpSpPr/>
           <p:nvPr/>
         </p:nvGrpSpPr>
         <p:grpSpPr>
-          <a:xfrm rot="0">
+          <a:xfrm>
             <a:off x="11853418" y="0"/>
             <a:ext cx="6259749" cy="10287000"/>
             <a:chOff x="0" y="0"/>
@@ -3797,12 +3705,12 @@
         </p:grpSpPr>
         <p:sp>
           <p:nvSpPr>
-            <p:cNvPr name="Freeform 6" id="6"/>
+            <p:cNvPr id="6" name="Freeform 6"/>
             <p:cNvSpPr/>
             <p:nvPr/>
           </p:nvSpPr>
           <p:spPr>
-            <a:xfrm flipH="false" flipV="false" rot="0">
+            <a:xfrm>
               <a:off x="0" y="0"/>
               <a:ext cx="1474379" cy="2422941"/>
             </a:xfrm>
@@ -3811,9 +3719,9 @@
               <a:gdLst/>
               <a:ahLst/>
               <a:cxnLst/>
-              <a:rect r="r" b="b" t="t" l="l"/>
+              <a:rect l="l" t="t" r="r" b="b"/>
               <a:pathLst>
-                <a:path h="2422941" w="1474379">
+                <a:path w="1474379" h="2422941">
                   <a:moveTo>
                     <a:pt x="986937" y="0"/>
                   </a:moveTo>
@@ -3864,10 +3772,17 @@
             <a:blipFill>
               <a:blip r:embed="rId2"/>
               <a:stretch>
-                <a:fillRect l="0" t="-289" r="0" b="-289"/>
+                <a:fillRect t="-289" b="-289"/>
               </a:stretch>
             </a:blipFill>
           </p:spPr>
+          <p:txBody>
+            <a:bodyPr/>
+            <a:lstStyle/>
+            <a:p>
+              <a:endParaRPr lang="he-IL"/>
+            </a:p>
+          </p:txBody>
         </p:sp>
       </p:grpSp>
     </p:spTree>
@@ -3879,13 +3794,14 @@
 </file>
 
 <file path=ppt/slides/slide3.xml><?xml version="1.0" encoding="utf-8"?>
-<p:sld xmlns:p="http://schemas.openxmlformats.org/presentationml/2006/main" xmlns:a="http://schemas.openxmlformats.org/drawingml/2006/main" xmlns:r="http://schemas.openxmlformats.org/officeDocument/2006/relationships">
+<p:sld xmlns:a="http://schemas.openxmlformats.org/drawingml/2006/main" xmlns:r="http://schemas.openxmlformats.org/officeDocument/2006/relationships" xmlns:p="http://schemas.openxmlformats.org/presentationml/2006/main">
   <p:cSld>
     <p:bg>
       <p:bgPr>
         <a:solidFill>
           <a:srgbClr val="1A1F36"/>
         </a:solidFill>
+        <a:effectLst/>
       </p:bgPr>
     </p:bg>
     <p:spTree>
@@ -3902,52 +3818,36 @@
           <a:chExt cx="0" cy="0"/>
         </a:xfrm>
       </p:grpSpPr>
-      <p:sp>
-        <p:nvSpPr>
-          <p:cNvPr name="Freeform 2" id="2"/>
-          <p:cNvSpPr/>
+      <p:pic>
+        <p:nvPicPr>
+          <p:cNvPr id="4" name="תמונה 3">
+            <a:extLst>
+              <a:ext uri="{FF2B5EF4-FFF2-40B4-BE49-F238E27FC236}">
+                <a16:creationId xmlns:a16="http://schemas.microsoft.com/office/drawing/2014/main" id="{0A23501C-EB0E-14C7-2019-4FBA6F8474CC}"/>
+              </a:ext>
+            </a:extLst>
+          </p:cNvPr>
+          <p:cNvPicPr>
+            <a:picLocks noChangeAspect="1"/>
+          </p:cNvPicPr>
           <p:nvPr/>
-        </p:nvSpPr>
+        </p:nvPicPr>
+        <p:blipFill>
+          <a:blip r:embed="rId2"/>
+          <a:stretch>
+            <a:fillRect/>
+          </a:stretch>
+        </p:blipFill>
         <p:spPr>
-          <a:xfrm flipH="false" flipV="false" rot="0">
-            <a:off x="1822292" y="0"/>
-            <a:ext cx="14643416" cy="10287000"/>
+          <a:xfrm>
+            <a:off x="1821051" y="0"/>
+            <a:ext cx="14645898" cy="10287000"/>
           </a:xfrm>
-          <a:custGeom>
+          <a:prstGeom prst="rect">
             <a:avLst/>
-            <a:gdLst/>
-            <a:ahLst/>
-            <a:cxnLst/>
-            <a:rect r="r" b="b" t="t" l="l"/>
-            <a:pathLst>
-              <a:path h="10287000" w="14643416">
-                <a:moveTo>
-                  <a:pt x="0" y="0"/>
-                </a:moveTo>
-                <a:lnTo>
-                  <a:pt x="14643416" y="0"/>
-                </a:lnTo>
-                <a:lnTo>
-                  <a:pt x="14643416" y="10287000"/>
-                </a:lnTo>
-                <a:lnTo>
-                  <a:pt x="0" y="10287000"/>
-                </a:lnTo>
-                <a:lnTo>
-                  <a:pt x="0" y="0"/>
-                </a:lnTo>
-                <a:close/>
-              </a:path>
-            </a:pathLst>
-          </a:custGeom>
-          <a:blipFill>
-            <a:blip r:embed="rId2"/>
-            <a:stretch>
-              <a:fillRect l="0" t="0" r="0" b="0"/>
-            </a:stretch>
-          </a:blipFill>
+          </a:prstGeom>
         </p:spPr>
-      </p:sp>
+      </p:pic>
     </p:spTree>
   </p:cSld>
   <p:clrMapOvr>
@@ -3957,13 +3857,14 @@
 </file>
 
 <file path=ppt/slides/slide4.xml><?xml version="1.0" encoding="utf-8"?>
-<p:sld xmlns:p="http://schemas.openxmlformats.org/presentationml/2006/main" xmlns:a="http://schemas.openxmlformats.org/drawingml/2006/main" xmlns:r="http://schemas.openxmlformats.org/officeDocument/2006/relationships">
+<p:sld xmlns:a="http://schemas.openxmlformats.org/drawingml/2006/main" xmlns:r="http://schemas.openxmlformats.org/officeDocument/2006/relationships" xmlns:p="http://schemas.openxmlformats.org/presentationml/2006/main">
   <p:cSld>
     <p:bg>
       <p:bgPr>
         <a:solidFill>
           <a:srgbClr val="1A1F36"/>
         </a:solidFill>
+        <a:effectLst/>
       </p:bgPr>
     </p:bg>
     <p:spTree>
@@ -3982,12 +3883,12 @@
       </p:grpSpPr>
       <p:sp>
         <p:nvSpPr>
-          <p:cNvPr name="Freeform 2" id="2"/>
+          <p:cNvPr id="2" name="Freeform 2"/>
           <p:cNvSpPr/>
           <p:nvPr/>
         </p:nvSpPr>
         <p:spPr>
-          <a:xfrm flipH="false" flipV="false" rot="0">
+          <a:xfrm>
             <a:off x="0" y="2194560"/>
             <a:ext cx="18288000" cy="8092440"/>
           </a:xfrm>
@@ -3996,9 +3897,9 @@
             <a:gdLst/>
             <a:ahLst/>
             <a:cxnLst/>
-            <a:rect r="r" b="b" t="t" l="l"/>
+            <a:rect l="l" t="t" r="r" b="b"/>
             <a:pathLst>
-              <a:path h="8092440" w="18288000">
+              <a:path w="18288000" h="8092440">
                 <a:moveTo>
                   <a:pt x="0" y="0"/>
                 </a:moveTo>
@@ -4021,19 +3922,26 @@
           <a:blipFill>
             <a:blip r:embed="rId2"/>
             <a:stretch>
-              <a:fillRect l="0" t="0" r="0" b="0"/>
+              <a:fillRect/>
             </a:stretch>
           </a:blipFill>
         </p:spPr>
-      </p:sp>
-      <p:sp>
-        <p:nvSpPr>
-          <p:cNvPr name="TextBox 3" id="3"/>
-          <p:cNvSpPr txBox="true"/>
+        <p:txBody>
+          <a:bodyPr/>
+          <a:lstStyle/>
+          <a:p>
+            <a:endParaRPr lang="he-IL"/>
+          </a:p>
+        </p:txBody>
+      </p:sp>
+      <p:sp>
+        <p:nvSpPr>
+          <p:cNvPr id="3" name="TextBox 3"/>
+          <p:cNvSpPr txBox="1"/>
           <p:nvPr/>
         </p:nvSpPr>
         <p:spPr>
-          <a:xfrm rot="0">
+          <a:xfrm>
             <a:off x="3557587" y="765820"/>
             <a:ext cx="11172825" cy="1428740"/>
           </a:xfrm>
@@ -4042,12 +3950,12 @@
           </a:prstGeom>
         </p:spPr>
         <p:txBody>
-          <a:bodyPr anchor="t" rtlCol="false" tIns="0" lIns="0" bIns="0" rIns="0">
+          <a:bodyPr lIns="0" tIns="0" rIns="0" bIns="0" rtlCol="0" anchor="t">
             <a:spAutoFit/>
           </a:bodyPr>
           <a:lstStyle/>
           <a:p>
-            <a:pPr algn="ctr" marL="0" indent="0" lvl="0">
+            <a:pPr marL="0" lvl="0" indent="0" algn="ctr">
               <a:lnSpc>
                 <a:spcPts val="8999"/>
               </a:lnSpc>
@@ -4056,7 +3964,7 @@
               </a:spcBef>
             </a:pPr>
             <a:r>
-              <a:rPr lang="en-US" b="true" sz="9999" spc="-99" strike="noStrike" u="sng">
+              <a:rPr lang="en-US" sz="9999" b="1" u="sng" strike="noStrike" spc="-99">
                 <a:solidFill>
                   <a:srgbClr val="AAB8DF"/>
                 </a:solidFill>
@@ -4080,13 +3988,14 @@
 </file>
 
 <file path=ppt/slides/slide5.xml><?xml version="1.0" encoding="utf-8"?>
-<p:sld xmlns:p="http://schemas.openxmlformats.org/presentationml/2006/main" xmlns:a="http://schemas.openxmlformats.org/drawingml/2006/main">
+<p:sld xmlns:a="http://schemas.openxmlformats.org/drawingml/2006/main" xmlns:r="http://schemas.openxmlformats.org/officeDocument/2006/relationships" xmlns:p="http://schemas.openxmlformats.org/presentationml/2006/main">
   <p:cSld>
     <p:bg>
       <p:bgPr>
         <a:solidFill>
           <a:srgbClr val="1A1F36"/>
         </a:solidFill>
+        <a:effectLst/>
       </p:bgPr>
     </p:bg>
     <p:spTree>
@@ -4105,12 +4014,12 @@
       </p:grpSpPr>
       <p:grpSp>
         <p:nvGrpSpPr>
-          <p:cNvPr name="Group 2" id="2"/>
+          <p:cNvPr id="2" name="Group 2"/>
           <p:cNvGrpSpPr/>
           <p:nvPr/>
         </p:nvGrpSpPr>
         <p:grpSpPr>
-          <a:xfrm rot="0">
+          <a:xfrm>
             <a:off x="-617773" y="6934200"/>
             <a:ext cx="19247032" cy="4815863"/>
             <a:chOff x="0" y="0"/>
@@ -4119,12 +4028,12 @@
         </p:grpSpPr>
         <p:sp>
           <p:nvSpPr>
-            <p:cNvPr name="Freeform 3" id="3"/>
+            <p:cNvPr id="3" name="Freeform 3"/>
             <p:cNvSpPr/>
             <p:nvPr/>
           </p:nvSpPr>
           <p:spPr>
-            <a:xfrm flipH="false" flipV="false" rot="0">
+            <a:xfrm>
               <a:off x="0" y="0"/>
               <a:ext cx="5069177" cy="1268375"/>
             </a:xfrm>
@@ -4133,9 +4042,9 @@
               <a:gdLst/>
               <a:ahLst/>
               <a:cxnLst/>
-              <a:rect r="r" b="b" t="t" l="l"/>
+              <a:rect l="l" t="t" r="r" b="b"/>
               <a:pathLst>
-                <a:path h="1268375" w="5069177">
+                <a:path w="5069177" h="1268375">
                   <a:moveTo>
                     <a:pt x="0" y="0"/>
                   </a:moveTo>
@@ -4156,11 +4065,18 @@
               <a:srgbClr val="C6D4FC"/>
             </a:solidFill>
           </p:spPr>
+          <p:txBody>
+            <a:bodyPr/>
+            <a:lstStyle/>
+            <a:p>
+              <a:endParaRPr lang="he-IL"/>
+            </a:p>
+          </p:txBody>
         </p:sp>
         <p:sp>
           <p:nvSpPr>
-            <p:cNvPr name="TextBox 4" id="4"/>
-            <p:cNvSpPr txBox="true"/>
+            <p:cNvPr id="4" name="TextBox 4"/>
+            <p:cNvSpPr txBox="1"/>
             <p:nvPr/>
           </p:nvSpPr>
           <p:spPr>
@@ -4173,7 +4089,7 @@
             </a:prstGeom>
           </p:spPr>
           <p:txBody>
-            <a:bodyPr anchor="ctr" rtlCol="false" tIns="50800" lIns="50800" bIns="50800" rIns="50800"/>
+            <a:bodyPr lIns="50800" tIns="50800" rIns="50800" bIns="50800" rtlCol="0" anchor="ctr"/>
             <a:lstStyle/>
             <a:p>
               <a:pPr algn="ctr">
@@ -4181,18 +4097,19 @@
                   <a:spcPts val="2524"/>
                 </a:lnSpc>
               </a:pPr>
+              <a:endParaRPr/>
             </a:p>
           </p:txBody>
         </p:sp>
       </p:grpSp>
       <p:grpSp>
         <p:nvGrpSpPr>
-          <p:cNvPr name="Group 5" id="5"/>
+          <p:cNvPr id="5" name="Group 5"/>
           <p:cNvGrpSpPr/>
           <p:nvPr/>
         </p:nvGrpSpPr>
         <p:grpSpPr>
-          <a:xfrm rot="0">
+          <a:xfrm>
             <a:off x="666750" y="7059583"/>
             <a:ext cx="5550994" cy="1779270"/>
             <a:chOff x="0" y="0"/>
@@ -4201,12 +4118,12 @@
         </p:grpSpPr>
         <p:sp>
           <p:nvSpPr>
-            <p:cNvPr name="TextBox 6" id="6"/>
-            <p:cNvSpPr txBox="true"/>
+            <p:cNvPr id="6" name="TextBox 6"/>
+            <p:cNvSpPr txBox="1"/>
             <p:nvPr/>
           </p:nvSpPr>
           <p:spPr>
-            <a:xfrm rot="0">
+            <a:xfrm>
               <a:off x="0" y="523875"/>
               <a:ext cx="6858000" cy="1848485"/>
             </a:xfrm>
@@ -4215,12 +4132,12 @@
             </a:prstGeom>
           </p:spPr>
           <p:txBody>
-            <a:bodyPr anchor="t" rtlCol="false" tIns="0" lIns="0" bIns="0" rIns="0">
+            <a:bodyPr lIns="0" tIns="0" rIns="0" bIns="0" rtlCol="0" anchor="t">
               <a:spAutoFit/>
             </a:bodyPr>
             <a:lstStyle/>
             <a:p>
-              <a:pPr algn="l" marL="0" indent="0" lvl="0">
+              <a:pPr marL="0" lvl="0" indent="0" algn="l">
                 <a:lnSpc>
                   <a:spcPts val="2729"/>
                 </a:lnSpc>
@@ -4229,7 +4146,7 @@
                 </a:spcBef>
               </a:pPr>
               <a:r>
-                <a:rPr lang="en-US" sz="1950" strike="noStrike" u="none">
+                <a:rPr lang="en-US" sz="1950" u="none" strike="noStrike">
                   <a:solidFill>
                     <a:srgbClr val="1E3923"/>
                   </a:solidFill>
@@ -4245,12 +4162,12 @@
         </p:sp>
         <p:sp>
           <p:nvSpPr>
-            <p:cNvPr name="TextBox 7" id="7"/>
-            <p:cNvSpPr txBox="true"/>
+            <p:cNvPr id="7" name="TextBox 7"/>
+            <p:cNvSpPr txBox="1"/>
             <p:nvPr/>
           </p:nvSpPr>
           <p:spPr>
-            <a:xfrm rot="0">
+            <a:xfrm>
               <a:off x="0" y="-123825"/>
               <a:ext cx="7401325" cy="733425"/>
             </a:xfrm>
@@ -4259,12 +4176,12 @@
             </a:prstGeom>
           </p:spPr>
           <p:txBody>
-            <a:bodyPr anchor="t" rtlCol="false" tIns="0" lIns="0" bIns="0" rIns="0">
+            <a:bodyPr lIns="0" tIns="0" rIns="0" bIns="0" rtlCol="0" anchor="t">
               <a:spAutoFit/>
             </a:bodyPr>
             <a:lstStyle/>
             <a:p>
-              <a:pPr algn="l" marL="0" indent="0" lvl="0">
+              <a:pPr marL="0" lvl="0" indent="0" algn="l">
                 <a:lnSpc>
                   <a:spcPts val="4200"/>
                 </a:lnSpc>
@@ -4273,7 +4190,7 @@
                 </a:spcBef>
               </a:pPr>
               <a:r>
-                <a:rPr lang="en-US" b="true" sz="3000">
+                <a:rPr lang="en-US" sz="3000" b="1">
                   <a:solidFill>
                     <a:srgbClr val="000000"/>
                   </a:solidFill>
@@ -4290,12 +4207,12 @@
       </p:grpSp>
       <p:grpSp>
         <p:nvGrpSpPr>
-          <p:cNvPr name="Group 8" id="8"/>
+          <p:cNvPr id="8" name="Group 8"/>
           <p:cNvGrpSpPr/>
           <p:nvPr/>
         </p:nvGrpSpPr>
         <p:grpSpPr>
-          <a:xfrm rot="0">
+          <a:xfrm>
             <a:off x="6572250" y="4095750"/>
             <a:ext cx="5143500" cy="1934013"/>
             <a:chOff x="0" y="0"/>
@@ -4304,12 +4221,12 @@
         </p:grpSpPr>
         <p:sp>
           <p:nvSpPr>
-            <p:cNvPr name="TextBox 9" id="9"/>
-            <p:cNvSpPr txBox="true"/>
+            <p:cNvPr id="9" name="TextBox 9"/>
+            <p:cNvSpPr txBox="1"/>
             <p:nvPr/>
           </p:nvSpPr>
           <p:spPr>
-            <a:xfrm rot="0">
+            <a:xfrm>
               <a:off x="0" y="730199"/>
               <a:ext cx="6858000" cy="1848485"/>
             </a:xfrm>
@@ -4318,12 +4235,12 @@
             </a:prstGeom>
           </p:spPr>
           <p:txBody>
-            <a:bodyPr anchor="t" rtlCol="false" tIns="0" lIns="0" bIns="0" rIns="0">
+            <a:bodyPr lIns="0" tIns="0" rIns="0" bIns="0" rtlCol="0" anchor="t">
               <a:spAutoFit/>
             </a:bodyPr>
             <a:lstStyle/>
             <a:p>
-              <a:pPr algn="l" marL="0" indent="0" lvl="0">
+              <a:pPr marL="0" lvl="0" indent="0" algn="l">
                 <a:lnSpc>
                   <a:spcPts val="2729"/>
                 </a:lnSpc>
@@ -4332,7 +4249,7 @@
                 </a:spcBef>
               </a:pPr>
               <a:r>
-                <a:rPr lang="en-US" sz="1950" strike="noStrike" u="none">
+                <a:rPr lang="en-US" sz="1950" u="none" strike="noStrike">
                   <a:solidFill>
                     <a:srgbClr val="C9D2E3"/>
                   </a:solidFill>
@@ -4341,55 +4258,19 @@
                   <a:cs typeface="Nyutro Sans"/>
                   <a:sym typeface="Nyutro Sans"/>
                 </a:rPr>
-                <a:t>Active objects and thread-safe pub/sub </a:t>
-              </a:r>
-              <a:r>
-                <a:rPr lang="en-US" sz="1950" strike="noStrike" u="none">
-                  <a:solidFill>
-                    <a:srgbClr val="C9D2E3"/>
-                  </a:solidFill>
-                  <a:latin typeface="Nyutro Sans"/>
-                  <a:ea typeface="Nyutro Sans"/>
-                  <a:cs typeface="Nyutro Sans"/>
-                  <a:sym typeface="Nyutro Sans"/>
-                </a:rPr>
-                <a:t>archit</a:t>
-              </a:r>
-              <a:r>
-                <a:rPr lang="en-US" sz="1950" strike="noStrike" u="none">
-                  <a:solidFill>
-                    <a:srgbClr val="C9D2E3"/>
-                  </a:solidFill>
-                  <a:latin typeface="Nyutro Sans"/>
-                  <a:ea typeface="Nyutro Sans"/>
-                  <a:cs typeface="Nyutro Sans"/>
-                  <a:sym typeface="Nyutro Sans"/>
-                </a:rPr>
-                <a:t>e</a:t>
-              </a:r>
-              <a:r>
-                <a:rPr lang="en-US" sz="1950" strike="noStrike" u="none">
-                  <a:solidFill>
-                    <a:srgbClr val="C9D2E3"/>
-                  </a:solidFill>
-                  <a:latin typeface="Nyutro Sans"/>
-                  <a:ea typeface="Nyutro Sans"/>
-                  <a:cs typeface="Nyutro Sans"/>
-                  <a:sym typeface="Nyutro Sans"/>
-                </a:rPr>
-                <a:t>cture and design patterns, with open/closed principle and scalability options in the future</a:t>
+                <a:t>Active objects and thread-safe pub/sub architecture and design patterns, with open/closed principle and scalability options in the future</a:t>
               </a:r>
             </a:p>
           </p:txBody>
         </p:sp>
         <p:sp>
           <p:nvSpPr>
-            <p:cNvPr name="TextBox 10" id="10"/>
-            <p:cNvSpPr txBox="true"/>
+            <p:cNvPr id="10" name="TextBox 10"/>
+            <p:cNvSpPr txBox="1"/>
             <p:nvPr/>
           </p:nvSpPr>
           <p:spPr>
-            <a:xfrm rot="0">
+            <a:xfrm>
               <a:off x="0" y="-123825"/>
               <a:ext cx="6858000" cy="733425"/>
             </a:xfrm>
@@ -4398,12 +4279,12 @@
             </a:prstGeom>
           </p:spPr>
           <p:txBody>
-            <a:bodyPr anchor="t" rtlCol="false" tIns="0" lIns="0" bIns="0" rIns="0">
+            <a:bodyPr lIns="0" tIns="0" rIns="0" bIns="0" rtlCol="0" anchor="t">
               <a:spAutoFit/>
             </a:bodyPr>
             <a:lstStyle/>
             <a:p>
-              <a:pPr algn="l" marL="0" indent="0" lvl="0">
+              <a:pPr marL="0" lvl="0" indent="0" algn="l">
                 <a:lnSpc>
                   <a:spcPts val="4200"/>
                 </a:lnSpc>
@@ -4412,7 +4293,7 @@
                 </a:spcBef>
               </a:pPr>
               <a:r>
-                <a:rPr lang="en-US" b="true" sz="3000" strike="noStrike" u="none">
+                <a:rPr lang="en-US" sz="3000" b="1" u="none" strike="noStrike">
                   <a:solidFill>
                     <a:srgbClr val="FFFFFF"/>
                   </a:solidFill>
@@ -4429,12 +4310,12 @@
       </p:grpSp>
       <p:grpSp>
         <p:nvGrpSpPr>
-          <p:cNvPr name="Group 11" id="11"/>
+          <p:cNvPr id="11" name="Group 11"/>
           <p:cNvGrpSpPr/>
           <p:nvPr/>
         </p:nvGrpSpPr>
         <p:grpSpPr>
-          <a:xfrm rot="0">
+          <a:xfrm>
             <a:off x="12477750" y="4095750"/>
             <a:ext cx="5143500" cy="1731645"/>
             <a:chOff x="0" y="0"/>
@@ -4443,12 +4324,12 @@
         </p:grpSpPr>
         <p:sp>
           <p:nvSpPr>
-            <p:cNvPr name="TextBox 12" id="12"/>
-            <p:cNvSpPr txBox="true"/>
+            <p:cNvPr id="12" name="TextBox 12"/>
+            <p:cNvSpPr txBox="1"/>
             <p:nvPr/>
           </p:nvSpPr>
           <p:spPr>
-            <a:xfrm rot="0">
+            <a:xfrm>
               <a:off x="0" y="917575"/>
               <a:ext cx="6858000" cy="1391285"/>
             </a:xfrm>
@@ -4457,12 +4338,12 @@
             </a:prstGeom>
           </p:spPr>
           <p:txBody>
-            <a:bodyPr anchor="t" rtlCol="false" tIns="0" lIns="0" bIns="0" rIns="0">
+            <a:bodyPr lIns="0" tIns="0" rIns="0" bIns="0" rtlCol="0" anchor="t">
               <a:spAutoFit/>
             </a:bodyPr>
             <a:lstStyle/>
             <a:p>
-              <a:pPr algn="l" marL="0" indent="0" lvl="0">
+              <a:pPr marL="0" lvl="0" indent="0" algn="l">
                 <a:lnSpc>
                   <a:spcPts val="2729"/>
                 </a:lnSpc>
@@ -4471,7 +4352,7 @@
                 </a:spcBef>
               </a:pPr>
               <a:r>
-                <a:rPr lang="en-US" sz="1950" strike="noStrike" u="none">
+                <a:rPr lang="en-US" sz="1950" u="none" strike="noStrike">
                   <a:solidFill>
                     <a:srgbClr val="C9D2E3"/>
                   </a:solidFill>
@@ -4484,7 +4365,7 @@
               </a:r>
             </a:p>
             <a:p>
-              <a:pPr algn="l" marL="0" indent="0" lvl="0">
+              <a:pPr marL="0" lvl="0" indent="0" algn="l">
                 <a:lnSpc>
                   <a:spcPts val="2729"/>
                 </a:lnSpc>
@@ -4493,7 +4374,7 @@
                 </a:spcBef>
               </a:pPr>
               <a:r>
-                <a:rPr lang="en-US" sz="1950" strike="noStrike" u="none">
+                <a:rPr lang="en-US" sz="1950" u="none" strike="noStrike">
                   <a:solidFill>
                     <a:srgbClr val="C9D2E3"/>
                   </a:solidFill>
@@ -4506,7 +4387,7 @@
               </a:r>
             </a:p>
             <a:p>
-              <a:pPr algn="l" marL="0" indent="0" lvl="0">
+              <a:pPr marL="0" lvl="0" indent="0" algn="l">
                 <a:lnSpc>
                   <a:spcPts val="2729"/>
                 </a:lnSpc>
@@ -4515,7 +4396,7 @@
                 </a:spcBef>
               </a:pPr>
               <a:r>
-                <a:rPr lang="en-US" sz="1950" strike="noStrike" u="none">
+                <a:rPr lang="en-US" sz="1950" u="none" strike="noStrike">
                   <a:solidFill>
                     <a:srgbClr val="C9D2E3"/>
                   </a:solidFill>
@@ -4531,12 +4412,12 @@
         </p:sp>
         <p:sp>
           <p:nvSpPr>
-            <p:cNvPr name="TextBox 13" id="13"/>
-            <p:cNvSpPr txBox="true"/>
+            <p:cNvPr id="13" name="TextBox 13"/>
+            <p:cNvSpPr txBox="1"/>
             <p:nvPr/>
           </p:nvSpPr>
           <p:spPr>
-            <a:xfrm rot="0">
+            <a:xfrm>
               <a:off x="0" y="-123825"/>
               <a:ext cx="6858000" cy="733425"/>
             </a:xfrm>
@@ -4545,12 +4426,12 @@
             </a:prstGeom>
           </p:spPr>
           <p:txBody>
-            <a:bodyPr anchor="t" rtlCol="false" tIns="0" lIns="0" bIns="0" rIns="0">
+            <a:bodyPr lIns="0" tIns="0" rIns="0" bIns="0" rtlCol="0" anchor="t">
               <a:spAutoFit/>
             </a:bodyPr>
             <a:lstStyle/>
             <a:p>
-              <a:pPr algn="l" marL="0" indent="0" lvl="0">
+              <a:pPr marL="0" lvl="0" indent="0" algn="l">
                 <a:lnSpc>
                   <a:spcPts val="4200"/>
                 </a:lnSpc>
@@ -4559,7 +4440,7 @@
                 </a:spcBef>
               </a:pPr>
               <a:r>
-                <a:rPr lang="en-US" b="true" sz="3000" strike="noStrike" u="none">
+                <a:rPr lang="en-US" sz="3000" b="1" u="none" strike="noStrike">
                   <a:solidFill>
                     <a:srgbClr val="FFFFFF"/>
                   </a:solidFill>
@@ -4576,12 +4457,12 @@
       </p:grpSp>
       <p:sp>
         <p:nvSpPr>
-          <p:cNvPr name="TextBox 14" id="14"/>
-          <p:cNvSpPr txBox="true"/>
+          <p:cNvPr id="14" name="TextBox 14"/>
+          <p:cNvSpPr txBox="1"/>
           <p:nvPr/>
         </p:nvSpPr>
         <p:spPr>
-          <a:xfrm rot="0">
+          <a:xfrm>
             <a:off x="666750" y="742950"/>
             <a:ext cx="14077950" cy="2324100"/>
           </a:xfrm>
@@ -4590,12 +4471,12 @@
           </a:prstGeom>
         </p:spPr>
         <p:txBody>
-          <a:bodyPr anchor="t" rtlCol="false" tIns="0" lIns="0" bIns="0" rIns="0">
+          <a:bodyPr lIns="0" tIns="0" rIns="0" bIns="0" rtlCol="0" anchor="t">
             <a:spAutoFit/>
           </a:bodyPr>
           <a:lstStyle/>
           <a:p>
-            <a:pPr algn="l" marL="0" indent="0" lvl="0">
+            <a:pPr marL="0" lvl="0" indent="0" algn="l">
               <a:lnSpc>
                 <a:spcPts val="8100"/>
               </a:lnSpc>
@@ -4604,7 +4485,7 @@
               </a:spcBef>
             </a:pPr>
             <a:r>
-              <a:rPr lang="en-US" b="true" sz="9000" spc="-89" strike="noStrike" u="none">
+              <a:rPr lang="en-US" sz="9000" b="1" u="none" strike="noStrike" spc="-89">
                 <a:solidFill>
                   <a:srgbClr val="AAB8DF"/>
                 </a:solidFill>
@@ -4620,12 +4501,12 @@
       </p:sp>
       <p:grpSp>
         <p:nvGrpSpPr>
-          <p:cNvPr name="Group 15" id="15"/>
+          <p:cNvPr id="15" name="Group 15"/>
           <p:cNvGrpSpPr/>
           <p:nvPr/>
         </p:nvGrpSpPr>
         <p:grpSpPr>
-          <a:xfrm rot="0">
+          <a:xfrm>
             <a:off x="819150" y="4248150"/>
             <a:ext cx="5143500" cy="1279559"/>
             <a:chOff x="0" y="0"/>
@@ -4634,12 +4515,12 @@
         </p:grpSpPr>
         <p:sp>
           <p:nvSpPr>
-            <p:cNvPr name="TextBox 16" id="16"/>
-            <p:cNvSpPr txBox="true"/>
+            <p:cNvPr id="16" name="TextBox 16"/>
+            <p:cNvSpPr txBox="1"/>
             <p:nvPr/>
           </p:nvSpPr>
           <p:spPr>
-            <a:xfrm rot="0">
+            <a:xfrm>
               <a:off x="0" y="771993"/>
               <a:ext cx="6858000" cy="934085"/>
             </a:xfrm>
@@ -4648,12 +4529,12 @@
             </a:prstGeom>
           </p:spPr>
           <p:txBody>
-            <a:bodyPr anchor="t" rtlCol="false" tIns="0" lIns="0" bIns="0" rIns="0">
+            <a:bodyPr lIns="0" tIns="0" rIns="0" bIns="0" rtlCol="0" anchor="t">
               <a:spAutoFit/>
             </a:bodyPr>
             <a:lstStyle/>
             <a:p>
-              <a:pPr algn="l" marL="0" indent="0" lvl="0">
+              <a:pPr marL="0" lvl="0" indent="0" algn="l">
                 <a:lnSpc>
                   <a:spcPts val="2729"/>
                 </a:lnSpc>
@@ -4662,7 +4543,7 @@
                 </a:spcBef>
               </a:pPr>
               <a:r>
-                <a:rPr lang="en-US" sz="1950" strike="noStrike" u="none">
+                <a:rPr lang="en-US" sz="1950" u="none" strike="noStrike">
                   <a:solidFill>
                     <a:srgbClr val="C9D2E3"/>
                   </a:solidFill>
@@ -4678,12 +4559,12 @@
         </p:sp>
         <p:sp>
           <p:nvSpPr>
-            <p:cNvPr name="TextBox 17" id="17"/>
-            <p:cNvSpPr txBox="true"/>
+            <p:cNvPr id="17" name="TextBox 17"/>
+            <p:cNvSpPr txBox="1"/>
             <p:nvPr/>
           </p:nvSpPr>
           <p:spPr>
-            <a:xfrm rot="0">
+            <a:xfrm>
               <a:off x="0" y="-123825"/>
               <a:ext cx="6858000" cy="733425"/>
             </a:xfrm>
@@ -4692,12 +4573,12 @@
             </a:prstGeom>
           </p:spPr>
           <p:txBody>
-            <a:bodyPr anchor="t" rtlCol="false" tIns="0" lIns="0" bIns="0" rIns="0">
+            <a:bodyPr lIns="0" tIns="0" rIns="0" bIns="0" rtlCol="0" anchor="t">
               <a:spAutoFit/>
             </a:bodyPr>
             <a:lstStyle/>
             <a:p>
-              <a:pPr algn="l" marL="0" indent="0" lvl="0">
+              <a:pPr marL="0" lvl="0" indent="0" algn="l">
                 <a:lnSpc>
                   <a:spcPts val="4200"/>
                 </a:lnSpc>
@@ -4706,7 +4587,7 @@
                 </a:spcBef>
               </a:pPr>
               <a:r>
-                <a:rPr lang="en-US" b="true" sz="3000" strike="noStrike" u="none">
+                <a:rPr lang="en-US" sz="3000" b="1" u="none" strike="noStrike">
                   <a:solidFill>
                     <a:srgbClr val="FFFFFF"/>
                   </a:solidFill>
@@ -4723,12 +4604,12 @@
       </p:grpSp>
       <p:grpSp>
         <p:nvGrpSpPr>
-          <p:cNvPr name="Group 18" id="18"/>
+          <p:cNvPr id="18" name="Group 18"/>
           <p:cNvGrpSpPr/>
           <p:nvPr/>
         </p:nvGrpSpPr>
         <p:grpSpPr>
-          <a:xfrm rot="0">
+          <a:xfrm>
             <a:off x="6572250" y="7059583"/>
             <a:ext cx="5143500" cy="1279559"/>
             <a:chOff x="0" y="0"/>
@@ -4737,12 +4618,12 @@
         </p:grpSpPr>
         <p:sp>
           <p:nvSpPr>
-            <p:cNvPr name="TextBox 19" id="19"/>
-            <p:cNvSpPr txBox="true"/>
+            <p:cNvPr id="19" name="TextBox 19"/>
+            <p:cNvSpPr txBox="1"/>
             <p:nvPr/>
           </p:nvSpPr>
           <p:spPr>
-            <a:xfrm rot="0">
+            <a:xfrm>
               <a:off x="0" y="771993"/>
               <a:ext cx="6858000" cy="934085"/>
             </a:xfrm>
@@ -4751,12 +4632,12 @@
             </a:prstGeom>
           </p:spPr>
           <p:txBody>
-            <a:bodyPr anchor="t" rtlCol="false" tIns="0" lIns="0" bIns="0" rIns="0">
+            <a:bodyPr lIns="0" tIns="0" rIns="0" bIns="0" rtlCol="0" anchor="t">
               <a:spAutoFit/>
             </a:bodyPr>
             <a:lstStyle/>
             <a:p>
-              <a:pPr algn="l" marL="0" indent="0" lvl="0">
+              <a:pPr marL="0" lvl="0" indent="0" algn="l">
                 <a:lnSpc>
                   <a:spcPts val="2729"/>
                 </a:lnSpc>
@@ -4765,7 +4646,7 @@
                 </a:spcBef>
               </a:pPr>
               <a:r>
-                <a:rPr lang="en-US" sz="1950" strike="noStrike" u="none">
+                <a:rPr lang="en-US" sz="1950" u="none" strike="noStrike">
                   <a:solidFill>
                     <a:srgbClr val="1E3923"/>
                   </a:solidFill>
@@ -4781,12 +4662,12 @@
         </p:sp>
         <p:sp>
           <p:nvSpPr>
-            <p:cNvPr name="TextBox 20" id="20"/>
-            <p:cNvSpPr txBox="true"/>
+            <p:cNvPr id="20" name="TextBox 20"/>
+            <p:cNvSpPr txBox="1"/>
             <p:nvPr/>
           </p:nvSpPr>
           <p:spPr>
-            <a:xfrm rot="0">
+            <a:xfrm>
               <a:off x="0" y="-123825"/>
               <a:ext cx="6858000" cy="733425"/>
             </a:xfrm>
@@ -4795,12 +4676,12 @@
             </a:prstGeom>
           </p:spPr>
           <p:txBody>
-            <a:bodyPr anchor="t" rtlCol="false" tIns="0" lIns="0" bIns="0" rIns="0">
+            <a:bodyPr lIns="0" tIns="0" rIns="0" bIns="0" rtlCol="0" anchor="t">
               <a:spAutoFit/>
             </a:bodyPr>
             <a:lstStyle/>
             <a:p>
-              <a:pPr algn="l" marL="0" indent="0" lvl="0">
+              <a:pPr marL="0" lvl="0" indent="0" algn="l">
                 <a:lnSpc>
                   <a:spcPts val="4200"/>
                 </a:lnSpc>
@@ -4809,7 +4690,7 @@
                 </a:spcBef>
               </a:pPr>
               <a:r>
-                <a:rPr lang="en-US" b="true" sz="3000">
+                <a:rPr lang="en-US" sz="3000" b="1">
                   <a:solidFill>
                     <a:srgbClr val="000000"/>
                   </a:solidFill>
@@ -4826,12 +4707,12 @@
       </p:grpSp>
       <p:grpSp>
         <p:nvGrpSpPr>
-          <p:cNvPr name="Group 21" id="21"/>
+          <p:cNvPr id="21" name="Group 21"/>
           <p:cNvGrpSpPr/>
           <p:nvPr/>
         </p:nvGrpSpPr>
         <p:grpSpPr>
-          <a:xfrm rot="0">
+          <a:xfrm>
             <a:off x="12477750" y="7059583"/>
             <a:ext cx="5143500" cy="1279559"/>
             <a:chOff x="0" y="0"/>
@@ -4840,12 +4721,12 @@
         </p:grpSpPr>
         <p:sp>
           <p:nvSpPr>
-            <p:cNvPr name="TextBox 22" id="22"/>
-            <p:cNvSpPr txBox="true"/>
+            <p:cNvPr id="22" name="TextBox 22"/>
+            <p:cNvSpPr txBox="1"/>
             <p:nvPr/>
           </p:nvSpPr>
           <p:spPr>
-            <a:xfrm rot="0">
+            <a:xfrm>
               <a:off x="0" y="771993"/>
               <a:ext cx="6858000" cy="934085"/>
             </a:xfrm>
@@ -4854,12 +4735,12 @@
             </a:prstGeom>
           </p:spPr>
           <p:txBody>
-            <a:bodyPr anchor="t" rtlCol="false" tIns="0" lIns="0" bIns="0" rIns="0">
+            <a:bodyPr lIns="0" tIns="0" rIns="0" bIns="0" rtlCol="0" anchor="t">
               <a:spAutoFit/>
             </a:bodyPr>
             <a:lstStyle/>
             <a:p>
-              <a:pPr algn="l" marL="0" indent="0" lvl="0">
+              <a:pPr marL="0" lvl="0" indent="0" algn="l">
                 <a:lnSpc>
                   <a:spcPts val="2729"/>
                 </a:lnSpc>
@@ -4884,12 +4765,12 @@
         </p:sp>
         <p:sp>
           <p:nvSpPr>
-            <p:cNvPr name="TextBox 23" id="23"/>
-            <p:cNvSpPr txBox="true"/>
+            <p:cNvPr id="23" name="TextBox 23"/>
+            <p:cNvSpPr txBox="1"/>
             <p:nvPr/>
           </p:nvSpPr>
           <p:spPr>
-            <a:xfrm rot="0">
+            <a:xfrm>
               <a:off x="0" y="-123825"/>
               <a:ext cx="6858000" cy="733425"/>
             </a:xfrm>
@@ -4898,12 +4779,12 @@
             </a:prstGeom>
           </p:spPr>
           <p:txBody>
-            <a:bodyPr anchor="t" rtlCol="false" tIns="0" lIns="0" bIns="0" rIns="0">
+            <a:bodyPr lIns="0" tIns="0" rIns="0" bIns="0" rtlCol="0" anchor="t">
               <a:spAutoFit/>
             </a:bodyPr>
             <a:lstStyle/>
             <a:p>
-              <a:pPr algn="l" marL="0" indent="0" lvl="0">
+              <a:pPr marL="0" lvl="0" indent="0" algn="l">
                 <a:lnSpc>
                   <a:spcPts val="4200"/>
                 </a:lnSpc>
@@ -4912,7 +4793,7 @@
                 </a:spcBef>
               </a:pPr>
               <a:r>
-                <a:rPr lang="en-US" b="true" sz="3000">
+                <a:rPr lang="en-US" sz="3000" b="1">
                   <a:solidFill>
                     <a:srgbClr val="000000"/>
                   </a:solidFill>
